--- a/dist/초3/수학/자연수계산/초3_수학_자연수계산_04_곱셈구구로몫구하기_학생용.pptx
+++ b/dist/초3/수학/자연수계산/초3_수학_자연수계산_04_곱셈구구로몫구하기_학생용.pptx
@@ -118,44 +118,44 @@
   <p:extLst>
     <p:ext uri="{521415D9-36F7-43E2-AB2F-B90AF26B5E84}">
       <p14:sectionLst xmlns:p14="http://schemas.microsoft.com/office/powerpoint/2010/main">
-        <p14:section name="도입" id="{fc7130e1-3bfb-1a1c-12d6-7eb1eb8d3910}">
+        <p14:section name="도입" id="{1e4682fa-7195-c042-1518-a63435ae1cd8}">
           <p14:sldIdLst>
             <p14:sldId id="256"/>
             <p14:sldId id="257"/>
           </p14:sldIdLst>
         </p14:section>
-        <p14:section name="개념" id="{3c45b954-d20a-dbf0-04ab-43e8b180f06c}">
+        <p14:section name="개념" id="{e3f31106-de92-bea8-c5d8-6a67b6c62816}">
           <p14:sldIdLst>
             <p14:sldId id="258"/>
             <p14:sldId id="259"/>
             <p14:sldId id="262"/>
           </p14:sldIdLst>
         </p14:section>
-        <p14:section name="연습" id="{ec48567f-73b8-b071-3e6b-188d759a891a}">
+        <p14:section name="연습" id="{1384d10a-cef0-043a-e00b-d331e321bdb0}">
           <p14:sldIdLst>
             <p14:sldId id="260"/>
             <p14:sldId id="261"/>
             <p14:sldId id="263"/>
           </p14:sldIdLst>
         </p14:section>
-        <p14:section name="개념" id="{9c545cee-65d5-d2d8-4bd9-f1523ed0aa52}">
+        <p14:section name="개념" id="{c104f725-1c0e-805f-64d8-f58f8fb25efa}">
           <p14:sldIdLst/>
         </p14:section>
-        <p14:section name="연습" id="{30038da5-057c-8312-1acf-9e10ebd202ce}">
+        <p14:section name="연습" id="{5132550a-7492-fae4-92ec-774b05ca2d12}">
           <p14:sldIdLst/>
         </p14:section>
-        <p14:section name="확인" id="{dfc53227-7a8e-5084-16ad-4097d756dcdd}">
+        <p14:section name="확인" id="{3089f07a-ac05-569f-88b7-ba21964db4c8}">
           <p14:sldIdLst>
             <p14:sldId id="264"/>
             <p14:sldId id="265"/>
           </p14:sldIdLst>
         </p14:section>
-        <p14:section name="정리" id="{78b2b290-c2da-cf3c-059e-bbb5236d20ae}">
+        <p14:section name="정리" id="{2ae617e7-4cb5-bb19-a602-9e58b2f9f2d6}">
           <p14:sldIdLst>
             <p14:sldId id="266"/>
           </p14:sldIdLst>
         </p14:section>
-        <p14:section name="보충" id="{69474c3e-9db6-5057-e8df-4f57ed7213c8}">
+        <p14:section name="보충" id="{cf51c92b-8848-ecab-8cba-7b2d43207470}">
           <p14:sldIdLst>
             <p14:sldId id="267"/>
           </p14:sldIdLst>
@@ -6671,7 +6671,7 @@
           </p:nvPr>
         </p:nvGraphicFramePr>
         <p:xfrm>
-          <a:off x="973836" y="2404110"/>
+          <a:off x="973836" y="2434590"/>
           <a:ext cx="10241280" cy="914400"/>
         </p:xfrm>
         <a:graphic>
@@ -6690,7 +6690,7 @@
                 <a:gridCol w="1024128"/>
                 <a:gridCol w="1024128"/>
               </a:tblGrid>
-              <a:tr h="487680">
+              <a:tr h="472440">
                 <a:tc>
                   <a:txBody>
                     <a:bodyPr/>
@@ -7372,7 +7372,7 @@
                   </a:tcPr>
                 </a:tc>
               </a:tr>
-              <a:tr h="487680">
+              <a:tr h="472440">
                 <a:tc>
                   <a:txBody>
                     <a:bodyPr/>
@@ -8054,7 +8054,7 @@
                   </a:tcPr>
                 </a:tc>
               </a:tr>
-              <a:tr h="487680">
+              <a:tr h="472440">
                 <a:tc>
                   <a:txBody>
                     <a:bodyPr/>
@@ -8736,7 +8736,7 @@
                   </a:tcPr>
                 </a:tc>
               </a:tr>
-              <a:tr h="487680">
+              <a:tr h="472440">
                 <a:tc>
                   <a:txBody>
                     <a:bodyPr/>
